--- a/backend/test_output.pptx
+++ b/backend/test_output.pptx
@@ -17,7 +17,7 @@
     <p:sldId id="265" r:id="rId16"/>
     <p:sldId id="266" r:id="rId17"/>
   </p:sldIdLst>
-  <p:sldSz cx="12188952" cy="6858000" type="screen4x3"/>
+  <p:sldSz cx="12191695" cy="6858000" type="screen4x3"/>
   <p:notesSz cx="6858000" cy="9144000"/>
   <p:defaultTextStyle>
     <a:defPPr>
@@ -3180,77 +3180,136 @@
       <p:grpSpPr/>
       <p:sp>
         <p:nvSpPr>
-          <p:cNvPr id="2" name="Title 1"/>
-          <p:cNvSpPr>
-            <a:spLocks noGrp="1"/>
-          </p:cNvSpPr>
-          <p:nvPr>
-            <p:ph type="title"/>
-          </p:nvPr>
-        </p:nvSpPr>
-        <p:spPr/>
-        <p:txBody>
-          <a:bodyPr/>
-          <a:lstStyle/>
-          <a:p>
-            <a:pPr>
-              <a:defRPr sz="3600" b="1">
-                <a:latin typeface="Times New Roman"/>
-              </a:defRPr>
+          <p:cNvPr id="2" name="TextBox 1"/>
+          <p:cNvSpPr txBox="1"/>
+          <p:nvPr/>
+        </p:nvSpPr>
+        <p:spPr>
+          <a:xfrm>
+            <a:off x="914400" y="640080"/>
+            <a:ext cx="10362895" cy="914400"/>
+          </a:xfrm>
+          <a:prstGeom prst="rect">
+            <a:avLst/>
+          </a:prstGeom>
+          <a:noFill/>
+        </p:spPr>
+        <p:txBody>
+          <a:bodyPr wrap="square">
+            <a:normAutofit/>
+          </a:bodyPr>
+          <a:lstStyle/>
+          <a:p>
+            <a:r>
+              <a:rPr sz="3200"/>
+              <a:t>Future Work</a:t>
+            </a:r>
+          </a:p>
+        </p:txBody>
+      </p:sp>
+      <p:sp>
+        <p:nvSpPr>
+          <p:cNvPr id="3" name="TextBox 2"/>
+          <p:cNvSpPr txBox="1"/>
+          <p:nvPr/>
+        </p:nvSpPr>
+        <p:spPr>
+          <a:xfrm>
+            <a:off x="914400" y="1554480"/>
+            <a:ext cx="10362895" cy="4663440"/>
+          </a:xfrm>
+          <a:prstGeom prst="rect">
+            <a:avLst/>
+          </a:prstGeom>
+          <a:noFill/>
+        </p:spPr>
+        <p:txBody>
+          <a:bodyPr wrap="square">
+            <a:normAutofit/>
+          </a:bodyPr>
+          <a:lstStyle/>
+          <a:p>
+            <a:pPr algn="l">
+              <a:lnSpc>
+                <a:spcPct val="115000"/>
+              </a:lnSpc>
+              <a:spcAft>
+                <a:spcPts val="600"/>
+              </a:spcAft>
+              <a:defRPr sz="2000"/>
             </a:pPr>
             <a:r>
-              <a:t>Future Work</a:t>
-            </a:r>
-          </a:p>
-        </p:txBody>
-      </p:sp>
-      <p:sp>
-        <p:nvSpPr>
-          <p:cNvPr id="3" name="Content Placeholder 2"/>
-          <p:cNvSpPr>
-            <a:spLocks noGrp="1"/>
-          </p:cNvSpPr>
-          <p:nvPr>
-            <p:ph idx="1"/>
-          </p:nvPr>
-        </p:nvSpPr>
-        <p:spPr/>
-        <p:txBody>
-          <a:bodyPr/>
-          <a:lstStyle/>
-          <a:p>
-            <a:pPr>
-              <a:defRPr sz="2000">
-                <a:latin typeface="Times New Roman"/>
-              </a:defRPr>
+              <a:t>Should focus on developing more efficient variants that maintain high performance while reducing computational requirements</a:t>
+            </a:r>
+          </a:p>
+          <a:p>
+            <a:pPr algn="l">
+              <a:lnSpc>
+                <a:spcPct val="115000"/>
+              </a:lnSpc>
+              <a:spcAft>
+                <a:spcPts val="600"/>
+              </a:spcAft>
+              <a:defRPr sz="2000"/>
             </a:pPr>
             <a:r>
-              <a:t>• Should focus on developing more efficient variants that maintain high performance while reducing computational requirements</a:t>
-            </a:r>
-          </a:p>
-          <a:p>
-            <a:r>
-              <a:t>• "Attention is all you need</a:t>
-            </a:r>
-          </a:p>
-          <a:p>
-            <a:r>
-              <a:t>• " Advances in neural information processing systems 30 (2017)</a:t>
-            </a:r>
-          </a:p>
-          <a:p>
-            <a:r>
-              <a:t>• "BERT: Pre-training of Deep Bidirectional Transformers for Language Understanding</a:t>
-            </a:r>
-          </a:p>
-          <a:p>
-            <a:r>
-              <a:t>• "Language Models are Few-Shot Learners</a:t>
-            </a:r>
-          </a:p>
-          <a:p>
-            <a:r>
-              <a:t>• " Advances in neural information processing systems 33 (2020)</a:t>
+              <a:t>"Attention is all you need</a:t>
+            </a:r>
+          </a:p>
+          <a:p>
+            <a:pPr algn="l">
+              <a:lnSpc>
+                <a:spcPct val="115000"/>
+              </a:lnSpc>
+              <a:spcAft>
+                <a:spcPts val="600"/>
+              </a:spcAft>
+              <a:defRPr sz="2000"/>
+            </a:pPr>
+            <a:r>
+              <a:t>" Advances in neural information processing systems 30 (2017)</a:t>
+            </a:r>
+          </a:p>
+          <a:p>
+            <a:pPr algn="l">
+              <a:lnSpc>
+                <a:spcPct val="115000"/>
+              </a:lnSpc>
+              <a:spcAft>
+                <a:spcPts val="600"/>
+              </a:spcAft>
+              <a:defRPr sz="2000"/>
+            </a:pPr>
+            <a:r>
+              <a:t>"BERT: Pre-training of Deep Bidirectional Transformers for Language Understanding</a:t>
+            </a:r>
+          </a:p>
+          <a:p>
+            <a:pPr algn="l">
+              <a:lnSpc>
+                <a:spcPct val="115000"/>
+              </a:lnSpc>
+              <a:spcAft>
+                <a:spcPts val="600"/>
+              </a:spcAft>
+              <a:defRPr sz="2000"/>
+            </a:pPr>
+            <a:r>
+              <a:t>"Language Models are Few-Shot Learners</a:t>
+            </a:r>
+          </a:p>
+          <a:p>
+            <a:pPr algn="l">
+              <a:lnSpc>
+                <a:spcPct val="115000"/>
+              </a:lnSpc>
+              <a:spcAft>
+                <a:spcPts val="600"/>
+              </a:spcAft>
+              <a:defRPr sz="2000"/>
+            </a:pPr>
+            <a:r>
+              <a:t>" Advances in neural information processing systems 33 (2020)</a:t>
             </a:r>
           </a:p>
         </p:txBody>
@@ -3460,57 +3519,80 @@
       <p:grpSpPr/>
       <p:sp>
         <p:nvSpPr>
-          <p:cNvPr id="2" name="Title 1"/>
-          <p:cNvSpPr>
-            <a:spLocks noGrp="1"/>
-          </p:cNvSpPr>
-          <p:nvPr>
-            <p:ph type="title"/>
-          </p:nvPr>
-        </p:nvSpPr>
-        <p:spPr/>
-        <p:txBody>
-          <a:bodyPr/>
-          <a:lstStyle/>
-          <a:p>
-            <a:pPr>
-              <a:defRPr sz="3600" b="1">
-                <a:latin typeface="Times New Roman"/>
-              </a:defRPr>
+          <p:cNvPr id="2" name="TextBox 1"/>
+          <p:cNvSpPr txBox="1"/>
+          <p:nvPr/>
+        </p:nvSpPr>
+        <p:spPr>
+          <a:xfrm>
+            <a:off x="914400" y="640080"/>
+            <a:ext cx="10362895" cy="914400"/>
+          </a:xfrm>
+          <a:prstGeom prst="rect">
+            <a:avLst/>
+          </a:prstGeom>
+          <a:noFill/>
+        </p:spPr>
+        <p:txBody>
+          <a:bodyPr wrap="square">
+            <a:normAutofit/>
+          </a:bodyPr>
+          <a:lstStyle/>
+          <a:p>
+            <a:r>
+              <a:rPr sz="3200"/>
+              <a:t>Abstract</a:t>
+            </a:r>
+          </a:p>
+        </p:txBody>
+      </p:sp>
+      <p:sp>
+        <p:nvSpPr>
+          <p:cNvPr id="3" name="TextBox 2"/>
+          <p:cNvSpPr txBox="1"/>
+          <p:nvPr/>
+        </p:nvSpPr>
+        <p:spPr>
+          <a:xfrm>
+            <a:off x="914400" y="1554480"/>
+            <a:ext cx="10362895" cy="4663440"/>
+          </a:xfrm>
+          <a:prstGeom prst="rect">
+            <a:avLst/>
+          </a:prstGeom>
+          <a:noFill/>
+        </p:spPr>
+        <p:txBody>
+          <a:bodyPr wrap="square">
+            <a:normAutofit/>
+          </a:bodyPr>
+          <a:lstStyle/>
+          <a:p>
+            <a:pPr algn="l">
+              <a:lnSpc>
+                <a:spcPct val="115000"/>
+              </a:lnSpc>
+              <a:spcAft>
+                <a:spcPts val="600"/>
+              </a:spcAft>
+              <a:defRPr sz="2000"/>
             </a:pPr>
             <a:r>
-              <a:t>Abstract</a:t>
-            </a:r>
-          </a:p>
-        </p:txBody>
-      </p:sp>
-      <p:sp>
-        <p:nvSpPr>
-          <p:cNvPr id="3" name="Content Placeholder 2"/>
-          <p:cNvSpPr>
-            <a:spLocks noGrp="1"/>
-          </p:cNvSpPr>
-          <p:nvPr>
-            <p:ph idx="1"/>
-          </p:nvPr>
-        </p:nvSpPr>
-        <p:spPr/>
-        <p:txBody>
-          <a:bodyPr/>
-          <a:lstStyle/>
-          <a:p>
-            <a:pPr>
-              <a:defRPr sz="2000">
-                <a:latin typeface="Times New Roman"/>
-              </a:defRPr>
+              <a:t>Abstract This paper presents a comprehensive study of machine learning approaches for natural language processing tasks</a:t>
+            </a:r>
+          </a:p>
+          <a:p>
+            <a:pPr algn="l">
+              <a:lnSpc>
+                <a:spcPct val="115000"/>
+              </a:lnSpc>
+              <a:spcAft>
+                <a:spcPts val="600"/>
+              </a:spcAft>
+              <a:defRPr sz="2000"/>
             </a:pPr>
             <a:r>
-              <a:t>• Abstract This paper presents a comprehensive study of machine learning approaches for natural language processing tasks</a:t>
-            </a:r>
-          </a:p>
-          <a:p>
-            <a:r>
-              <a:t>• We evaluate various algorithms including deep learning models, traditional statistical</a:t>
+              <a:t>We evaluate various algorithms including deep learning models, traditional statistical</a:t>
             </a:r>
           </a:p>
         </p:txBody>
@@ -3535,57 +3617,80 @@
       <p:grpSpPr/>
       <p:sp>
         <p:nvSpPr>
-          <p:cNvPr id="2" name="Title 1"/>
-          <p:cNvSpPr>
-            <a:spLocks noGrp="1"/>
-          </p:cNvSpPr>
-          <p:nvPr>
-            <p:ph type="title"/>
-          </p:nvPr>
-        </p:nvSpPr>
-        <p:spPr/>
-        <p:txBody>
-          <a:bodyPr/>
-          <a:lstStyle/>
-          <a:p>
-            <a:pPr>
-              <a:defRPr sz="3600" b="1">
-                <a:latin typeface="Times New Roman"/>
-              </a:defRPr>
+          <p:cNvPr id="2" name="TextBox 1"/>
+          <p:cNvSpPr txBox="1"/>
+          <p:nvPr/>
+        </p:nvSpPr>
+        <p:spPr>
+          <a:xfrm>
+            <a:off x="914400" y="640080"/>
+            <a:ext cx="10362895" cy="914400"/>
+          </a:xfrm>
+          <a:prstGeom prst="rect">
+            <a:avLst/>
+          </a:prstGeom>
+          <a:noFill/>
+        </p:spPr>
+        <p:txBody>
+          <a:bodyPr wrap="square">
+            <a:normAutofit/>
+          </a:bodyPr>
+          <a:lstStyle/>
+          <a:p>
+            <a:r>
+              <a:rPr sz="3200"/>
+              <a:t>Methods</a:t>
+            </a:r>
+          </a:p>
+        </p:txBody>
+      </p:sp>
+      <p:sp>
+        <p:nvSpPr>
+          <p:cNvPr id="3" name="TextBox 2"/>
+          <p:cNvSpPr txBox="1"/>
+          <p:nvPr/>
+        </p:nvSpPr>
+        <p:spPr>
+          <a:xfrm>
+            <a:off x="914400" y="1554480"/>
+            <a:ext cx="10362895" cy="4663440"/>
+          </a:xfrm>
+          <a:prstGeom prst="rect">
+            <a:avLst/>
+          </a:prstGeom>
+          <a:noFill/>
+        </p:spPr>
+        <p:txBody>
+          <a:bodyPr wrap="square">
+            <a:normAutofit/>
+          </a:bodyPr>
+          <a:lstStyle/>
+          <a:p>
+            <a:pPr algn="l">
+              <a:lnSpc>
+                <a:spcPct val="115000"/>
+              </a:lnSpc>
+              <a:spcAft>
+                <a:spcPts val="600"/>
+              </a:spcAft>
+              <a:defRPr sz="2000"/>
             </a:pPr>
             <a:r>
-              <a:t>Methods</a:t>
-            </a:r>
-          </a:p>
-        </p:txBody>
-      </p:sp>
-      <p:sp>
-        <p:nvSpPr>
-          <p:cNvPr id="3" name="Content Placeholder 2"/>
-          <p:cNvSpPr>
-            <a:spLocks noGrp="1"/>
-          </p:cNvSpPr>
-          <p:nvPr>
-            <p:ph idx="1"/>
-          </p:nvPr>
-        </p:nvSpPr>
-        <p:spPr/>
-        <p:txBody>
-          <a:bodyPr/>
-          <a:lstStyle/>
-          <a:p>
-            <a:pPr>
-              <a:defRPr sz="2000">
-                <a:latin typeface="Times New Roman"/>
-              </a:defRPr>
+              <a:t>2% for deep learning approaches</a:t>
+            </a:r>
+          </a:p>
+          <a:p>
+            <a:pPr algn="l">
+              <a:lnSpc>
+                <a:spcPct val="115000"/>
+              </a:lnSpc>
+              <a:spcAft>
+                <a:spcPts val="600"/>
+              </a:spcAft>
+              <a:defRPr sz="2000"/>
             </a:pPr>
             <a:r>
-              <a:t>• 2% for deep learning approaches</a:t>
-            </a:r>
-          </a:p>
-          <a:p>
-            <a:r>
-              <a:t>• BERT model specifically showed the best performance on classification tasks</a:t>
+              <a:t>BERT model specifically showed the best performance on classification tasks</a:t>
             </a:r>
           </a:p>
         </p:txBody>
@@ -3610,52 +3715,66 @@
       <p:grpSpPr/>
       <p:sp>
         <p:nvSpPr>
-          <p:cNvPr id="2" name="Title 1"/>
-          <p:cNvSpPr>
-            <a:spLocks noGrp="1"/>
-          </p:cNvSpPr>
-          <p:nvPr>
-            <p:ph type="title"/>
-          </p:nvPr>
-        </p:nvSpPr>
-        <p:spPr/>
-        <p:txBody>
-          <a:bodyPr/>
-          <a:lstStyle/>
-          <a:p>
-            <a:pPr>
-              <a:defRPr sz="3600" b="1">
-                <a:latin typeface="Times New Roman"/>
-              </a:defRPr>
+          <p:cNvPr id="2" name="TextBox 1"/>
+          <p:cNvSpPr txBox="1"/>
+          <p:nvPr/>
+        </p:nvSpPr>
+        <p:spPr>
+          <a:xfrm>
+            <a:off x="914400" y="640080"/>
+            <a:ext cx="10362895" cy="914400"/>
+          </a:xfrm>
+          <a:prstGeom prst="rect">
+            <a:avLst/>
+          </a:prstGeom>
+          <a:noFill/>
+        </p:spPr>
+        <p:txBody>
+          <a:bodyPr wrap="square">
+            <a:normAutofit/>
+          </a:bodyPr>
+          <a:lstStyle/>
+          <a:p>
+            <a:r>
+              <a:rPr sz="3200"/>
+              <a:t>Introduction</a:t>
+            </a:r>
+          </a:p>
+        </p:txBody>
+      </p:sp>
+      <p:sp>
+        <p:nvSpPr>
+          <p:cNvPr id="3" name="TextBox 2"/>
+          <p:cNvSpPr txBox="1"/>
+          <p:nvPr/>
+        </p:nvSpPr>
+        <p:spPr>
+          <a:xfrm>
+            <a:off x="914400" y="1554480"/>
+            <a:ext cx="10362895" cy="4663440"/>
+          </a:xfrm>
+          <a:prstGeom prst="rect">
+            <a:avLst/>
+          </a:prstGeom>
+          <a:noFill/>
+        </p:spPr>
+        <p:txBody>
+          <a:bodyPr wrap="square">
+            <a:normAutofit/>
+          </a:bodyPr>
+          <a:lstStyle/>
+          <a:p>
+            <a:pPr algn="l">
+              <a:lnSpc>
+                <a:spcPct val="115000"/>
+              </a:lnSpc>
+              <a:spcAft>
+                <a:spcPts val="600"/>
+              </a:spcAft>
+              <a:defRPr sz="2000"/>
             </a:pPr>
             <a:r>
-              <a:t>Introduction</a:t>
-            </a:r>
-          </a:p>
-        </p:txBody>
-      </p:sp>
-      <p:sp>
-        <p:nvSpPr>
-          <p:cNvPr id="3" name="Content Placeholder 2"/>
-          <p:cNvSpPr>
-            <a:spLocks noGrp="1"/>
-          </p:cNvSpPr>
-          <p:nvPr>
-            <p:ph idx="1"/>
-          </p:nvPr>
-        </p:nvSpPr>
-        <p:spPr/>
-        <p:txBody>
-          <a:bodyPr/>
-          <a:lstStyle/>
-          <a:p>
-            <a:pPr>
-              <a:defRPr sz="2000">
-                <a:latin typeface="Times New Roman"/>
-              </a:defRPr>
-            </a:pPr>
-            <a:r>
-              <a:t>• Recent advances in deep learning have revolutionized the way we approach NLP tasks</a:t>
+              <a:t>Recent advances in deep learning have revolutionized the way we approach NLP tasks</a:t>
             </a:r>
           </a:p>
         </p:txBody>
@@ -3680,57 +3799,80 @@
       <p:grpSpPr/>
       <p:sp>
         <p:nvSpPr>
-          <p:cNvPr id="2" name="Title 1"/>
-          <p:cNvSpPr>
-            <a:spLocks noGrp="1"/>
-          </p:cNvSpPr>
-          <p:nvPr>
-            <p:ph type="title"/>
-          </p:nvPr>
-        </p:nvSpPr>
-        <p:spPr/>
-        <p:txBody>
-          <a:bodyPr/>
-          <a:lstStyle/>
-          <a:p>
-            <a:pPr>
-              <a:defRPr sz="3600" b="1">
-                <a:latin typeface="Times New Roman"/>
-              </a:defRPr>
+          <p:cNvPr id="2" name="TextBox 1"/>
+          <p:cNvSpPr txBox="1"/>
+          <p:nvPr/>
+        </p:nvSpPr>
+        <p:spPr>
+          <a:xfrm>
+            <a:off x="914400" y="640080"/>
+            <a:ext cx="10362895" cy="914400"/>
+          </a:xfrm>
+          <a:prstGeom prst="rect">
+            <a:avLst/>
+          </a:prstGeom>
+          <a:noFill/>
+        </p:spPr>
+        <p:txBody>
+          <a:bodyPr wrap="square">
+            <a:normAutofit/>
+          </a:bodyPr>
+          <a:lstStyle/>
+          <a:p>
+            <a:r>
+              <a:rPr sz="3200"/>
+              <a:t>Results</a:t>
+            </a:r>
+          </a:p>
+        </p:txBody>
+      </p:sp>
+      <p:sp>
+        <p:nvSpPr>
+          <p:cNvPr id="3" name="TextBox 2"/>
+          <p:cNvSpPr txBox="1"/>
+          <p:nvPr/>
+        </p:nvSpPr>
+        <p:spPr>
+          <a:xfrm>
+            <a:off x="914400" y="1554480"/>
+            <a:ext cx="10362895" cy="4663440"/>
+          </a:xfrm>
+          <a:prstGeom prst="rect">
+            <a:avLst/>
+          </a:prstGeom>
+          <a:noFill/>
+        </p:spPr>
+        <p:txBody>
+          <a:bodyPr wrap="square">
+            <a:normAutofit/>
+          </a:bodyPr>
+          <a:lstStyle/>
+          <a:p>
+            <a:pPr algn="l">
+              <a:lnSpc>
+                <a:spcPct val="115000"/>
+              </a:lnSpc>
+              <a:spcAft>
+                <a:spcPts val="600"/>
+              </a:spcAft>
+              <a:defRPr sz="2000"/>
             </a:pPr>
             <a:r>
-              <a:t>Results</a:t>
-            </a:r>
-          </a:p>
-        </p:txBody>
-      </p:sp>
-      <p:sp>
-        <p:nvSpPr>
-          <p:cNvPr id="3" name="Content Placeholder 2"/>
-          <p:cNvSpPr>
-            <a:spLocks noGrp="1"/>
-          </p:cNvSpPr>
-          <p:nvPr>
-            <p:ph idx="1"/>
-          </p:nvPr>
-        </p:nvSpPr>
-        <p:spPr/>
-        <p:txBody>
-          <a:bodyPr/>
-          <a:lstStyle/>
-          <a:p>
-            <a:pPr>
-              <a:defRPr sz="2000">
-                <a:latin typeface="Times New Roman"/>
-              </a:defRPr>
+              <a:t>Results show that transformer-based models achieve an average accuracy of 92</a:t>
+            </a:r>
+          </a:p>
+          <a:p>
+            <a:pPr algn="l">
+              <a:lnSpc>
+                <a:spcPct val="115000"/>
+              </a:lnSpc>
+              <a:spcAft>
+                <a:spcPts val="600"/>
+              </a:spcAft>
+              <a:defRPr sz="2000"/>
             </a:pPr>
             <a:r>
-              <a:t>• Results show that transformer-based models achieve an average accuracy of 92</a:t>
-            </a:r>
-          </a:p>
-          <a:p>
-            <a:r>
-              <a:t>• 3% across all tasks, compared to 78</a:t>
+              <a:t>3% across all tasks, compared to 78</a:t>
             </a:r>
           </a:p>
         </p:txBody>
@@ -3755,62 +3897,94 @@
       <p:grpSpPr/>
       <p:sp>
         <p:nvSpPr>
-          <p:cNvPr id="2" name="Title 1"/>
-          <p:cNvSpPr>
-            <a:spLocks noGrp="1"/>
-          </p:cNvSpPr>
-          <p:nvPr>
-            <p:ph type="title"/>
-          </p:nvPr>
-        </p:nvSpPr>
-        <p:spPr/>
-        <p:txBody>
-          <a:bodyPr/>
-          <a:lstStyle/>
-          <a:p>
-            <a:pPr>
-              <a:defRPr sz="3600" b="1">
-                <a:latin typeface="Times New Roman"/>
-              </a:defRPr>
+          <p:cNvPr id="2" name="TextBox 1"/>
+          <p:cNvSpPr txBox="1"/>
+          <p:nvPr/>
+        </p:nvSpPr>
+        <p:spPr>
+          <a:xfrm>
+            <a:off x="914400" y="640080"/>
+            <a:ext cx="10362895" cy="914400"/>
+          </a:xfrm>
+          <a:prstGeom prst="rect">
+            <a:avLst/>
+          </a:prstGeom>
+          <a:noFill/>
+        </p:spPr>
+        <p:txBody>
+          <a:bodyPr wrap="square">
+            <a:normAutofit/>
+          </a:bodyPr>
+          <a:lstStyle/>
+          <a:p>
+            <a:r>
+              <a:rPr sz="3200"/>
+              <a:t>Discussion</a:t>
+            </a:r>
+          </a:p>
+        </p:txBody>
+      </p:sp>
+      <p:sp>
+        <p:nvSpPr>
+          <p:cNvPr id="3" name="TextBox 2"/>
+          <p:cNvSpPr txBox="1"/>
+          <p:nvPr/>
+        </p:nvSpPr>
+        <p:spPr>
+          <a:xfrm>
+            <a:off x="914400" y="1554480"/>
+            <a:ext cx="10362895" cy="4663440"/>
+          </a:xfrm>
+          <a:prstGeom prst="rect">
+            <a:avLst/>
+          </a:prstGeom>
+          <a:noFill/>
+        </p:spPr>
+        <p:txBody>
+          <a:bodyPr wrap="square">
+            <a:normAutofit/>
+          </a:bodyPr>
+          <a:lstStyle/>
+          <a:p>
+            <a:pPr algn="l">
+              <a:lnSpc>
+                <a:spcPct val="115000"/>
+              </a:lnSpc>
+              <a:spcAft>
+                <a:spcPts val="600"/>
+              </a:spcAft>
+              <a:defRPr sz="2000"/>
             </a:pPr>
             <a:r>
-              <a:t>Discussion</a:t>
-            </a:r>
-          </a:p>
-        </p:txBody>
-      </p:sp>
-      <p:sp>
-        <p:nvSpPr>
-          <p:cNvPr id="3" name="Content Placeholder 2"/>
-          <p:cNvSpPr>
-            <a:spLocks noGrp="1"/>
-          </p:cNvSpPr>
-          <p:nvPr>
-            <p:ph idx="1"/>
-          </p:nvPr>
-        </p:nvSpPr>
-        <p:spPr/>
-        <p:txBody>
-          <a:bodyPr/>
-          <a:lstStyle/>
-          <a:p>
-            <a:pPr>
-              <a:defRPr sz="2000">
-                <a:latin typeface="Times New Roman"/>
-              </a:defRPr>
+              <a:t>Discussion The superior performance of transformer models can be attributed to their ability to capture contextual relationships in text</a:t>
+            </a:r>
+          </a:p>
+          <a:p>
+            <a:pPr algn="l">
+              <a:lnSpc>
+                <a:spcPct val="115000"/>
+              </a:lnSpc>
+              <a:spcAft>
+                <a:spcPts val="600"/>
+              </a:spcAft>
+              <a:defRPr sz="2000"/>
             </a:pPr>
             <a:r>
-              <a:t>• Discussion The superior performance of transformer models can be attributed to their ability to capture contextual relationships in text</a:t>
-            </a:r>
-          </a:p>
-          <a:p>
-            <a:r>
-              <a:t>• However, these models require significant computational resources and training time</a:t>
-            </a:r>
-          </a:p>
-          <a:p>
-            <a:r>
-              <a:t>• We discuss the trade-offs between performance and efficiency</a:t>
+              <a:t>However, these models require significant computational resources and training time</a:t>
+            </a:r>
+          </a:p>
+          <a:p>
+            <a:pPr algn="l">
+              <a:lnSpc>
+                <a:spcPct val="115000"/>
+              </a:lnSpc>
+              <a:spcAft>
+                <a:spcPts val="600"/>
+              </a:spcAft>
+              <a:defRPr sz="2000"/>
+            </a:pPr>
+            <a:r>
+              <a:t>We discuss the trade-offs between performance and efficiency</a:t>
             </a:r>
           </a:p>
         </p:txBody>
@@ -3835,57 +4009,80 @@
       <p:grpSpPr/>
       <p:sp>
         <p:nvSpPr>
-          <p:cNvPr id="2" name="Title 1"/>
-          <p:cNvSpPr>
-            <a:spLocks noGrp="1"/>
-          </p:cNvSpPr>
-          <p:nvPr>
-            <p:ph type="title"/>
-          </p:nvPr>
-        </p:nvSpPr>
-        <p:spPr/>
-        <p:txBody>
-          <a:bodyPr/>
-          <a:lstStyle/>
-          <a:p>
-            <a:pPr>
-              <a:defRPr sz="3600" b="1">
-                <a:latin typeface="Times New Roman"/>
-              </a:defRPr>
+          <p:cNvPr id="2" name="TextBox 1"/>
+          <p:cNvSpPr txBox="1"/>
+          <p:nvPr/>
+        </p:nvSpPr>
+        <p:spPr>
+          <a:xfrm>
+            <a:off x="914400" y="640080"/>
+            <a:ext cx="10362895" cy="914400"/>
+          </a:xfrm>
+          <a:prstGeom prst="rect">
+            <a:avLst/>
+          </a:prstGeom>
+          <a:noFill/>
+        </p:spPr>
+        <p:txBody>
+          <a:bodyPr wrap="square">
+            <a:normAutofit/>
+          </a:bodyPr>
+          <a:lstStyle/>
+          <a:p>
+            <a:r>
+              <a:rPr sz="3200"/>
+              <a:t>Conclusion</a:t>
+            </a:r>
+          </a:p>
+        </p:txBody>
+      </p:sp>
+      <p:sp>
+        <p:nvSpPr>
+          <p:cNvPr id="3" name="TextBox 2"/>
+          <p:cNvSpPr txBox="1"/>
+          <p:nvPr/>
+        </p:nvSpPr>
+        <p:spPr>
+          <a:xfrm>
+            <a:off x="914400" y="1554480"/>
+            <a:ext cx="10362895" cy="4663440"/>
+          </a:xfrm>
+          <a:prstGeom prst="rect">
+            <a:avLst/>
+          </a:prstGeom>
+          <a:noFill/>
+        </p:spPr>
+        <p:txBody>
+          <a:bodyPr wrap="square">
+            <a:normAutofit/>
+          </a:bodyPr>
+          <a:lstStyle/>
+          <a:p>
+            <a:pPr algn="l">
+              <a:lnSpc>
+                <a:spcPct val="115000"/>
+              </a:lnSpc>
+              <a:spcAft>
+                <a:spcPts val="600"/>
+              </a:spcAft>
+              <a:defRPr sz="2000"/>
             </a:pPr>
             <a:r>
-              <a:t>Conclusion</a:t>
-            </a:r>
-          </a:p>
-        </p:txBody>
-      </p:sp>
-      <p:sp>
-        <p:nvSpPr>
-          <p:cNvPr id="3" name="Content Placeholder 2"/>
-          <p:cNvSpPr>
-            <a:spLocks noGrp="1"/>
-          </p:cNvSpPr>
-          <p:nvPr>
-            <p:ph idx="1"/>
-          </p:nvPr>
-        </p:nvSpPr>
-        <p:spPr/>
-        <p:txBody>
-          <a:bodyPr/>
-          <a:lstStyle/>
-          <a:p>
-            <a:pPr>
-              <a:defRPr sz="2000">
-                <a:latin typeface="Times New Roman"/>
-              </a:defRPr>
+              <a:t>Conclusion Transformer-based models represent the current state-of-the-art in NLP tasks</a:t>
+            </a:r>
+          </a:p>
+          <a:p>
+            <a:pPr algn="l">
+              <a:lnSpc>
+                <a:spcPct val="115000"/>
+              </a:lnSpc>
+              <a:spcAft>
+                <a:spcPts val="600"/>
+              </a:spcAft>
+              <a:defRPr sz="2000"/>
             </a:pPr>
             <a:r>
-              <a:t>• Conclusion Transformer-based models represent the current state-of-the-art in NLP tasks</a:t>
-            </a:r>
-          </a:p>
-          <a:p>
-            <a:r>
-              <a:t>• Future work should focus on developing more efficient variants that maintain high performance while reducing computational requirements</a:t>
+              <a:t>Future work should focus on developing more efficient variants that maintain high performance while reducing computational requirements</a:t>
             </a:r>
           </a:p>
         </p:txBody>
@@ -3910,72 +4107,122 @@
       <p:grpSpPr/>
       <p:sp>
         <p:nvSpPr>
-          <p:cNvPr id="2" name="Title 1"/>
-          <p:cNvSpPr>
-            <a:spLocks noGrp="1"/>
-          </p:cNvSpPr>
-          <p:nvPr>
-            <p:ph type="title"/>
-          </p:nvPr>
-        </p:nvSpPr>
-        <p:spPr/>
-        <p:txBody>
-          <a:bodyPr/>
-          <a:lstStyle/>
-          <a:p>
-            <a:pPr>
-              <a:defRPr sz="3600" b="1">
-                <a:latin typeface="Times New Roman"/>
-              </a:defRPr>
+          <p:cNvPr id="2" name="TextBox 1"/>
+          <p:cNvSpPr txBox="1"/>
+          <p:nvPr/>
+        </p:nvSpPr>
+        <p:spPr>
+          <a:xfrm>
+            <a:off x="914400" y="640080"/>
+            <a:ext cx="10362895" cy="914400"/>
+          </a:xfrm>
+          <a:prstGeom prst="rect">
+            <a:avLst/>
+          </a:prstGeom>
+          <a:noFill/>
+        </p:spPr>
+        <p:txBody>
+          <a:bodyPr wrap="square">
+            <a:normAutofit/>
+          </a:bodyPr>
+          <a:lstStyle/>
+          <a:p>
+            <a:r>
+              <a:rPr sz="3200"/>
+              <a:t>References</a:t>
+            </a:r>
+          </a:p>
+        </p:txBody>
+      </p:sp>
+      <p:sp>
+        <p:nvSpPr>
+          <p:cNvPr id="3" name="TextBox 2"/>
+          <p:cNvSpPr txBox="1"/>
+          <p:nvPr/>
+        </p:nvSpPr>
+        <p:spPr>
+          <a:xfrm>
+            <a:off x="914400" y="1554480"/>
+            <a:ext cx="10362895" cy="4663440"/>
+          </a:xfrm>
+          <a:prstGeom prst="rect">
+            <a:avLst/>
+          </a:prstGeom>
+          <a:noFill/>
+        </p:spPr>
+        <p:txBody>
+          <a:bodyPr wrap="square">
+            <a:normAutofit/>
+          </a:bodyPr>
+          <a:lstStyle/>
+          <a:p>
+            <a:pPr algn="l">
+              <a:lnSpc>
+                <a:spcPct val="115000"/>
+              </a:lnSpc>
+              <a:spcAft>
+                <a:spcPts val="600"/>
+              </a:spcAft>
+              <a:defRPr sz="2000"/>
             </a:pPr>
             <a:r>
-              <a:t>References</a:t>
-            </a:r>
-          </a:p>
-        </p:txBody>
-      </p:sp>
-      <p:sp>
-        <p:nvSpPr>
-          <p:cNvPr id="3" name="Content Placeholder 2"/>
-          <p:cNvSpPr>
-            <a:spLocks noGrp="1"/>
-          </p:cNvSpPr>
-          <p:nvPr>
-            <p:ph idx="1"/>
-          </p:nvPr>
-        </p:nvSpPr>
-        <p:spPr/>
-        <p:txBody>
-          <a:bodyPr/>
-          <a:lstStyle/>
-          <a:p>
-            <a:pPr>
-              <a:defRPr sz="2000">
-                <a:latin typeface="Times New Roman"/>
-              </a:defRPr>
+              <a:t>"Attention is all you need</a:t>
+            </a:r>
+          </a:p>
+          <a:p>
+            <a:pPr algn="l">
+              <a:lnSpc>
+                <a:spcPct val="115000"/>
+              </a:lnSpc>
+              <a:spcAft>
+                <a:spcPts val="600"/>
+              </a:spcAft>
+              <a:defRPr sz="2000"/>
             </a:pPr>
             <a:r>
-              <a:t>• "Attention is all you need</a:t>
-            </a:r>
-          </a:p>
-          <a:p>
-            <a:r>
-              <a:t>• " Advances in neural information processing systems 30 (2017)</a:t>
-            </a:r>
-          </a:p>
-          <a:p>
-            <a:r>
-              <a:t>• "BERT: Pre-training of Deep Bidirectional Transformers for Language Understanding</a:t>
-            </a:r>
-          </a:p>
-          <a:p>
-            <a:r>
-              <a:t>• "Language Models are Few-Shot Learners</a:t>
-            </a:r>
-          </a:p>
-          <a:p>
-            <a:r>
-              <a:t>• " Advances in neural information processing systems 33 (2020)</a:t>
+              <a:t>" Advances in neural information processing systems 30 (2017)</a:t>
+            </a:r>
+          </a:p>
+          <a:p>
+            <a:pPr algn="l">
+              <a:lnSpc>
+                <a:spcPct val="115000"/>
+              </a:lnSpc>
+              <a:spcAft>
+                <a:spcPts val="600"/>
+              </a:spcAft>
+              <a:defRPr sz="2000"/>
+            </a:pPr>
+            <a:r>
+              <a:t>"BERT: Pre-training of Deep Bidirectional Transformers for Language Understanding</a:t>
+            </a:r>
+          </a:p>
+          <a:p>
+            <a:pPr algn="l">
+              <a:lnSpc>
+                <a:spcPct val="115000"/>
+              </a:lnSpc>
+              <a:spcAft>
+                <a:spcPts val="600"/>
+              </a:spcAft>
+              <a:defRPr sz="2000"/>
+            </a:pPr>
+            <a:r>
+              <a:t>"Language Models are Few-Shot Learners</a:t>
+            </a:r>
+          </a:p>
+          <a:p>
+            <a:pPr algn="l">
+              <a:lnSpc>
+                <a:spcPct val="115000"/>
+              </a:lnSpc>
+              <a:spcAft>
+                <a:spcPts val="600"/>
+              </a:spcAft>
+              <a:defRPr sz="2000"/>
+            </a:pPr>
+            <a:r>
+              <a:t>" Advances in neural information processing systems 33 (2020)</a:t>
             </a:r>
           </a:p>
         </p:txBody>
